--- a/CineMetrics_Final.pptx
+++ b/CineMetrics_Final.pptx
@@ -5252,7 +5252,59 @@
               </a:rPr>
               <a:t>services/tmdb.py  →  TMDB API</a:t>
             </a:r>
-            <a:endParaRPr lang="en-US" sz="1400" dirty="0"/>
+          </a:p>
+          <a:p>
+            <a:pPr algn="ctr"/>
+            <a:r>
+              <a:rPr lang="en-US" sz="1400" b="1" dirty="0">
+                <a:solidFill>
+                  <a:srgbClr val="FFFFFF"/>
+                </a:solidFill>
+                <a:latin typeface="Calibri" pitchFamily="34" charset="0"/>
+                <a:cs typeface="Calibri" pitchFamily="34" charset="-120"/>
+              </a:rPr>
+              <a:t>MCP Server (</a:t>
+            </a:r>
+            <a:r>
+              <a:rPr lang="en-US" sz="1400" b="1" dirty="0" err="1">
+                <a:solidFill>
+                  <a:srgbClr val="FFFFFF"/>
+                </a:solidFill>
+                <a:latin typeface="Calibri" pitchFamily="34" charset="0"/>
+                <a:cs typeface="Calibri" pitchFamily="34" charset="-120"/>
+              </a:rPr>
+              <a:t>fastapi-mcp</a:t>
+            </a:r>
+            <a:r>
+              <a:rPr lang="en-US" sz="1400" b="1" dirty="0">
+                <a:solidFill>
+                  <a:srgbClr val="FFFFFF"/>
+                </a:solidFill>
+                <a:latin typeface="Calibri" pitchFamily="34" charset="0"/>
+                <a:cs typeface="Calibri" pitchFamily="34" charset="-120"/>
+              </a:rPr>
+              <a:t>) </a:t>
+            </a:r>
+            <a:r>
+              <a:rPr lang="en-US" altLang="zh-CN" sz="1400" b="1" dirty="0">
+                <a:solidFill>
+                  <a:srgbClr val="FFFFFF"/>
+                </a:solidFill>
+                <a:latin typeface="Calibri" pitchFamily="34" charset="0"/>
+                <a:cs typeface="Calibri" pitchFamily="34" charset="-120"/>
+              </a:rPr>
+              <a:t>→</a:t>
+            </a:r>
+            <a:r>
+              <a:rPr lang="en-US" sz="1400" b="1" dirty="0">
+                <a:solidFill>
+                  <a:srgbClr val="FFFFFF"/>
+                </a:solidFill>
+                <a:latin typeface="Calibri" pitchFamily="34" charset="0"/>
+                <a:cs typeface="Calibri" pitchFamily="34" charset="-120"/>
+              </a:rPr>
+              <a:t> 22 tools, local</a:t>
+            </a:r>
           </a:p>
         </p:txBody>
       </p:sp>
@@ -5937,7 +5989,7 @@
                 <a:ea typeface="Calibri" pitchFamily="34" charset="-122"/>
                 <a:cs typeface="Calibri" pitchFamily="34" charset="-120"/>
               </a:rPr>
-              <a:t>  Custom asyncio adapter → success</a:t>
+              <a:t>Custom asyncio adapter → success</a:t>
             </a:r>
             <a:endParaRPr lang="en-US" sz="1300" dirty="0"/>
           </a:p>
@@ -6155,10 +6207,9 @@
                   <a:srgbClr val="FFFFFF"/>
                 </a:solidFill>
                 <a:latin typeface="Arial Black" pitchFamily="34" charset="0"/>
-                <a:ea typeface="Arial Black" pitchFamily="34" charset="-122"/>
                 <a:cs typeface="Arial Black" pitchFamily="34" charset="-120"/>
               </a:rPr>
-              <a:t>14</a:t>
+              <a:t>36</a:t>
             </a:r>
             <a:endParaRPr lang="en-US" sz="14000" dirty="0"/>
           </a:p>
@@ -6544,7 +6595,29 @@
                 <a:ea typeface="Calibri" pitchFamily="34" charset="-122"/>
                 <a:cs typeface="Calibri" pitchFamily="34" charset="-120"/>
               </a:rPr>
-              <a:t>All 14 pass </a:t>
+              <a:t>All </a:t>
+            </a:r>
+            <a:r>
+              <a:rPr lang="en-US" altLang="zh-CN" sz="1200" dirty="0">
+                <a:solidFill>
+                  <a:srgbClr val="F2EDE0"/>
+                </a:solidFill>
+                <a:latin typeface="Calibri" pitchFamily="34" charset="0"/>
+                <a:ea typeface="Calibri" pitchFamily="34" charset="-122"/>
+                <a:cs typeface="Calibri" pitchFamily="34" charset="-120"/>
+              </a:rPr>
+              <a:t>36</a:t>
+            </a:r>
+            <a:r>
+              <a:rPr lang="en-US" sz="1200" dirty="0">
+                <a:solidFill>
+                  <a:srgbClr val="F2EDE0"/>
+                </a:solidFill>
+                <a:latin typeface="Calibri" pitchFamily="34" charset="0"/>
+                <a:ea typeface="Calibri" pitchFamily="34" charset="-122"/>
+                <a:cs typeface="Calibri" pitchFamily="34" charset="-120"/>
+              </a:rPr>
+              <a:t> pass </a:t>
             </a:r>
             <a:endParaRPr lang="en-US" sz="1200" dirty="0"/>
           </a:p>

--- a/CineMetrics_Final.pptx
+++ b/CineMetrics_Final.pptx
@@ -7993,21 +7993,36 @@
           <a:bodyPr wrap="square" lIns="0" tIns="0" rIns="0" bIns="0" rtlCol="0" anchor="ctr"/>
           <a:lstStyle/>
           <a:p>
-            <a:pPr marL="0" indent="0">
-              <a:buNone/>
-            </a:pPr>
+            <a:r>
+              <a:rPr lang="en" altLang="zh-CN" sz="1100" dirty="0">
+                <a:solidFill>
+                  <a:srgbClr val="CCCCCC"/>
+                </a:solidFill>
+                <a:latin typeface="Calibri" pitchFamily="34" charset="0"/>
+                <a:cs typeface="Calibri" pitchFamily="34" charset="-120"/>
+              </a:rPr>
+              <a:t>CineMetrics API - Swagger </a:t>
+            </a:r>
+            <a:r>
+              <a:rPr lang="en" altLang="zh-CN" sz="1100" dirty="0" err="1">
+                <a:solidFill>
+                  <a:srgbClr val="CCCCCC"/>
+                </a:solidFill>
+                <a:latin typeface="Calibri" pitchFamily="34" charset="0"/>
+                <a:cs typeface="Calibri" pitchFamily="34" charset="-120"/>
+              </a:rPr>
+              <a:t>UI.pdf</a:t>
+            </a:r>
             <a:r>
               <a:rPr lang="en-US" sz="1100" dirty="0">
                 <a:solidFill>
                   <a:srgbClr val="CCCCCC"/>
                 </a:solidFill>
                 <a:latin typeface="Calibri" pitchFamily="34" charset="0"/>
-                <a:ea typeface="Calibri" pitchFamily="34" charset="-122"/>
                 <a:cs typeface="Calibri" pitchFamily="34" charset="-120"/>
               </a:rPr>
-              <a:t>swagger_ui.pdf in repository root  ·  Swagger UI exported</a:t>
-            </a:r>
-            <a:endParaRPr lang="en-US" sz="1100" dirty="0"/>
+              <a:t> in repository root  ·  Swagger UI exported</a:t>
+            </a:r>
           </a:p>
         </p:txBody>
       </p:sp>

--- a/CineMetrics_Final.pptx
+++ b/CineMetrics_Final.pptx
@@ -5466,8 +5466,8 @@
         </p:nvSpPr>
         <p:spPr>
           <a:xfrm>
-            <a:off x="365760" y="502920"/>
-            <a:ext cx="4754880" cy="2743200"/>
+            <a:off x="365760" y="731520"/>
+            <a:ext cx="4583927" cy="2514600"/>
           </a:xfrm>
           <a:prstGeom prst="rect">
             <a:avLst/>
